--- a/簡報/磁鐵好好玩_教學簡報.pptx
+++ b/簡報/磁鐵好好玩_教學簡報.pptx
@@ -3317,7 +3317,7 @@
                 <a:ea typeface="微軟正黑體"/>
                 <a:cs typeface="微軟正黑體"/>
               </a:rPr>
-              <a:t>第 4 單元｜4 節課｜磁力・磁極・生活應用</a:t>
+              <a:t>第 2 單元｜4 節課｜磁力・磁極・生活應用</a:t>
             </a:r>
           </a:p>
         </p:txBody>
@@ -3490,7 +3490,7 @@
                 <a:ea typeface="微軟正黑體"/>
                 <a:cs typeface="微軟正黑體"/>
               </a:rPr>
-              <a:t>4-1・4-2</a:t>
+              <a:t>2-1・2-2</a:t>
             </a:r>
           </a:p>
         </p:txBody>
@@ -3912,7 +3912,7 @@
                 <a:ea typeface="微軟正黑體"/>
                 <a:cs typeface="微軟正黑體"/>
               </a:rPr>
-              <a:t>磁鐵好好玩｜翰林三上自然 第4單元</a:t>
+              <a:t>磁鐵好好玩｜翰林三上自然 第2單元</a:t>
             </a:r>
           </a:p>
         </p:txBody>
@@ -4056,7 +4056,7 @@
                 <a:ea typeface="微軟正黑體"/>
                 <a:cs typeface="微軟正黑體"/>
               </a:rPr>
-              <a:t>4-1</a:t>
+              <a:t>2-1</a:t>
             </a:r>
           </a:p>
         </p:txBody>
@@ -4380,7 +4380,7 @@
                 <a:ea typeface="微軟正黑體"/>
                 <a:cs typeface="微軟正黑體"/>
               </a:rPr>
-              <a:t>磁鐵好好玩｜翰林三上自然 第4單元</a:t>
+              <a:t>磁鐵好好玩｜翰林三上自然 第2單元</a:t>
             </a:r>
           </a:p>
         </p:txBody>
@@ -4524,7 +4524,7 @@
                 <a:ea typeface="微軟正黑體"/>
                 <a:cs typeface="微軟正黑體"/>
               </a:rPr>
-              <a:t>4-1</a:t>
+              <a:t>2-1</a:t>
             </a:r>
           </a:p>
         </p:txBody>
@@ -4885,7 +4885,7 @@
                 <a:ea typeface="微軟正黑體"/>
                 <a:cs typeface="微軟正黑體"/>
               </a:rPr>
-              <a:t>磁鐵好好玩｜翰林三上自然 第4單元</a:t>
+              <a:t>磁鐵好好玩｜翰林三上自然 第2單元</a:t>
             </a:r>
           </a:p>
         </p:txBody>
@@ -5029,7 +5029,7 @@
                 <a:ea typeface="微軟正黑體"/>
                 <a:cs typeface="微軟正黑體"/>
               </a:rPr>
-              <a:t>4-1</a:t>
+              <a:t>2-1</a:t>
             </a:r>
           </a:p>
         </p:txBody>
@@ -5390,7 +5390,7 @@
                 <a:ea typeface="微軟正黑體"/>
                 <a:cs typeface="微軟正黑體"/>
               </a:rPr>
-              <a:t>磁鐵好好玩｜翰林三上自然 第4單元</a:t>
+              <a:t>磁鐵好好玩｜翰林三上自然 第2單元</a:t>
             </a:r>
           </a:p>
         </p:txBody>
@@ -5534,7 +5534,7 @@
                 <a:ea typeface="微軟正黑體"/>
                 <a:cs typeface="微軟正黑體"/>
               </a:rPr>
-              <a:t>4-1</a:t>
+              <a:t>2-1</a:t>
             </a:r>
           </a:p>
         </p:txBody>
@@ -5872,7 +5872,7 @@
                 <a:ea typeface="微軟正黑體"/>
                 <a:cs typeface="微軟正黑體"/>
               </a:rPr>
-              <a:t>磁鐵好好玩｜翰林三上自然 第4單元</a:t>
+              <a:t>磁鐵好好玩｜翰林三上自然 第2單元</a:t>
             </a:r>
           </a:p>
         </p:txBody>
@@ -6016,7 +6016,7 @@
                 <a:ea typeface="微軟正黑體"/>
                 <a:cs typeface="微軟正黑體"/>
               </a:rPr>
-              <a:t>4-1</a:t>
+              <a:t>2-1</a:t>
             </a:r>
           </a:p>
         </p:txBody>
@@ -6347,7 +6347,7 @@
                 <a:ea typeface="微軟正黑體"/>
                 <a:cs typeface="微軟正黑體"/>
               </a:rPr>
-              <a:t>磁鐵好好玩｜翰林三上自然 第4單元</a:t>
+              <a:t>磁鐵好好玩｜翰林三上自然 第2單元</a:t>
             </a:r>
           </a:p>
         </p:txBody>
@@ -6491,7 +6491,7 @@
                 <a:ea typeface="微軟正黑體"/>
                 <a:cs typeface="微軟正黑體"/>
               </a:rPr>
-              <a:t>4-2</a:t>
+              <a:t>2-2</a:t>
             </a:r>
           </a:p>
         </p:txBody>
@@ -6917,7 +6917,7 @@
                 <a:ea typeface="微軟正黑體"/>
                 <a:cs typeface="微軟正黑體"/>
               </a:rPr>
-              <a:t>磁鐵好好玩｜翰林三上自然 第4單元</a:t>
+              <a:t>磁鐵好好玩｜翰林三上自然 第2單元</a:t>
             </a:r>
           </a:p>
         </p:txBody>
@@ -7061,7 +7061,7 @@
                 <a:ea typeface="微軟正黑體"/>
                 <a:cs typeface="微軟正黑體"/>
               </a:rPr>
-              <a:t>4-2</a:t>
+              <a:t>2-2</a:t>
             </a:r>
           </a:p>
         </p:txBody>
@@ -7385,7 +7385,7 @@
                 <a:ea typeface="微軟正黑體"/>
                 <a:cs typeface="微軟正黑體"/>
               </a:rPr>
-              <a:t>磁鐵好好玩｜翰林三上自然 第4單元</a:t>
+              <a:t>磁鐵好好玩｜翰林三上自然 第2單元</a:t>
             </a:r>
           </a:p>
         </p:txBody>
@@ -7529,7 +7529,7 @@
                 <a:ea typeface="微軟正黑體"/>
                 <a:cs typeface="微軟正黑體"/>
               </a:rPr>
-              <a:t>4-2</a:t>
+              <a:t>2-2</a:t>
             </a:r>
           </a:p>
         </p:txBody>
@@ -7866,7 +7866,7 @@
                 <a:ea typeface="微軟正黑體"/>
                 <a:cs typeface="微軟正黑體"/>
               </a:rPr>
-              <a:t>磁鐵好好玩｜翰林三上自然 第4單元</a:t>
+              <a:t>磁鐵好好玩｜翰林三上自然 第2單元</a:t>
             </a:r>
           </a:p>
         </p:txBody>
@@ -8010,7 +8010,7 @@
                 <a:ea typeface="微軟正黑體"/>
                 <a:cs typeface="微軟正黑體"/>
               </a:rPr>
-              <a:t>4-2</a:t>
+              <a:t>2-2</a:t>
             </a:r>
           </a:p>
         </p:txBody>
@@ -8312,7 +8312,7 @@
                 <a:ea typeface="微軟正黑體"/>
                 <a:cs typeface="微軟正黑體"/>
               </a:rPr>
-              <a:t>磁鐵好好玩｜翰林三上自然 第4單元</a:t>
+              <a:t>磁鐵好好玩｜翰林三上自然 第2單元</a:t>
             </a:r>
           </a:p>
         </p:txBody>
@@ -9422,7 +9422,7 @@
                 <a:ea typeface="微軟正黑體"/>
                 <a:cs typeface="微軟正黑體"/>
               </a:rPr>
-              <a:t>磁鐵好好玩｜翰林三上自然 第4單元</a:t>
+              <a:t>磁鐵好好玩｜翰林三上自然 第2單元</a:t>
             </a:r>
           </a:p>
         </p:txBody>
@@ -9566,7 +9566,7 @@
                 <a:ea typeface="微軟正黑體"/>
                 <a:cs typeface="微軟正黑體"/>
               </a:rPr>
-              <a:t>4-2</a:t>
+              <a:t>2-2</a:t>
             </a:r>
           </a:p>
         </p:txBody>
@@ -9863,7 +9863,7 @@
                 <a:ea typeface="微軟正黑體"/>
                 <a:cs typeface="微軟正黑體"/>
               </a:rPr>
-              <a:t>磁鐵好好玩｜翰林三上自然 第4單元</a:t>
+              <a:t>磁鐵好好玩｜翰林三上自然 第2單元</a:t>
             </a:r>
           </a:p>
         </p:txBody>
@@ -10007,7 +10007,7 @@
                 <a:ea typeface="微軟正黑體"/>
                 <a:cs typeface="微軟正黑體"/>
               </a:rPr>
-              <a:t>4-2</a:t>
+              <a:t>2-2</a:t>
             </a:r>
           </a:p>
         </p:txBody>
@@ -10345,7 +10345,7 @@
                 <a:ea typeface="微軟正黑體"/>
                 <a:cs typeface="微軟正黑體"/>
               </a:rPr>
-              <a:t>磁鐵好好玩｜翰林三上自然 第4單元</a:t>
+              <a:t>磁鐵好好玩｜翰林三上自然 第2單元</a:t>
             </a:r>
           </a:p>
         </p:txBody>
@@ -10489,7 +10489,7 @@
                 <a:ea typeface="微軟正黑體"/>
                 <a:cs typeface="微軟正黑體"/>
               </a:rPr>
-              <a:t>4-3</a:t>
+              <a:t>2-3</a:t>
             </a:r>
           </a:p>
         </p:txBody>
@@ -10912,7 +10912,7 @@
                 <a:ea typeface="微軟正黑體"/>
                 <a:cs typeface="微軟正黑體"/>
               </a:rPr>
-              <a:t>磁鐵好好玩｜翰林三上自然 第4單元</a:t>
+              <a:t>磁鐵好好玩｜翰林三上自然 第2單元</a:t>
             </a:r>
           </a:p>
         </p:txBody>
@@ -11056,7 +11056,7 @@
                 <a:ea typeface="微軟正黑體"/>
                 <a:cs typeface="微軟正黑體"/>
               </a:rPr>
-              <a:t>4-3</a:t>
+              <a:t>2-3</a:t>
             </a:r>
           </a:p>
         </p:txBody>
@@ -11596,7 +11596,7 @@
                 <a:ea typeface="微軟正黑體"/>
                 <a:cs typeface="微軟正黑體"/>
               </a:rPr>
-              <a:t>磁鐵好好玩｜翰林三上自然 第4單元</a:t>
+              <a:t>磁鐵好好玩｜翰林三上自然 第2單元</a:t>
             </a:r>
           </a:p>
         </p:txBody>
@@ -12162,7 +12162,7 @@
                 <a:ea typeface="微軟正黑體"/>
                 <a:cs typeface="微軟正黑體"/>
               </a:rPr>
-              <a:t>磁鐵好好玩｜翰林三上自然 第4單元</a:t>
+              <a:t>磁鐵好好玩｜翰林三上自然 第2單元</a:t>
             </a:r>
           </a:p>
         </p:txBody>
@@ -12306,7 +12306,7 @@
                 <a:ea typeface="微軟正黑體"/>
                 <a:cs typeface="微軟正黑體"/>
               </a:rPr>
-              <a:t>4-1</a:t>
+              <a:t>2-1</a:t>
             </a:r>
           </a:p>
         </p:txBody>
@@ -12728,7 +12728,7 @@
                 <a:ea typeface="微軟正黑體"/>
                 <a:cs typeface="微軟正黑體"/>
               </a:rPr>
-              <a:t>磁鐵好好玩｜翰林三上自然 第4單元</a:t>
+              <a:t>磁鐵好好玩｜翰林三上自然 第2單元</a:t>
             </a:r>
           </a:p>
         </p:txBody>
@@ -12872,7 +12872,7 @@
                 <a:ea typeface="微軟正黑體"/>
                 <a:cs typeface="微軟正黑體"/>
               </a:rPr>
-              <a:t>4-1</a:t>
+              <a:t>2-1</a:t>
             </a:r>
           </a:p>
         </p:txBody>
@@ -13196,7 +13196,7 @@
                 <a:ea typeface="微軟正黑體"/>
                 <a:cs typeface="微軟正黑體"/>
               </a:rPr>
-              <a:t>磁鐵好好玩｜翰林三上自然 第4單元</a:t>
+              <a:t>磁鐵好好玩｜翰林三上自然 第2單元</a:t>
             </a:r>
           </a:p>
         </p:txBody>
@@ -13340,7 +13340,7 @@
                 <a:ea typeface="微軟正黑體"/>
                 <a:cs typeface="微軟正黑體"/>
               </a:rPr>
-              <a:t>4-1</a:t>
+              <a:t>2-1</a:t>
             </a:r>
           </a:p>
         </p:txBody>
@@ -13780,7 +13780,7 @@
                 <a:ea typeface="微軟正黑體"/>
                 <a:cs typeface="微軟正黑體"/>
               </a:rPr>
-              <a:t>磁鐵好好玩｜翰林三上自然 第4單元</a:t>
+              <a:t>磁鐵好好玩｜翰林三上自然 第2單元</a:t>
             </a:r>
           </a:p>
         </p:txBody>
@@ -13924,7 +13924,7 @@
                 <a:ea typeface="微軟正黑體"/>
                 <a:cs typeface="微軟正黑體"/>
               </a:rPr>
-              <a:t>4-1</a:t>
+              <a:t>2-1</a:t>
             </a:r>
           </a:p>
         </p:txBody>
@@ -14431,7 +14431,7 @@
                 <a:ea typeface="微軟正黑體"/>
                 <a:cs typeface="微軟正黑體"/>
               </a:rPr>
-              <a:t>磁鐵好好玩｜翰林三上自然 第4單元</a:t>
+              <a:t>磁鐵好好玩｜翰林三上自然 第2單元</a:t>
             </a:r>
           </a:p>
         </p:txBody>
@@ -14575,7 +14575,7 @@
                 <a:ea typeface="微軟正黑體"/>
                 <a:cs typeface="微軟正黑體"/>
               </a:rPr>
-              <a:t>4-1</a:t>
+              <a:t>2-1</a:t>
             </a:r>
           </a:p>
         </p:txBody>
@@ -15097,7 +15097,7 @@
                 <a:ea typeface="微軟正黑體"/>
                 <a:cs typeface="微軟正黑體"/>
               </a:rPr>
-              <a:t>磁鐵好好玩｜翰林三上自然 第4單元</a:t>
+              <a:t>磁鐵好好玩｜翰林三上自然 第2單元</a:t>
             </a:r>
           </a:p>
         </p:txBody>
@@ -15241,7 +15241,7 @@
                 <a:ea typeface="微軟正黑體"/>
                 <a:cs typeface="微軟正黑體"/>
               </a:rPr>
-              <a:t>4-1</a:t>
+              <a:t>2-1</a:t>
             </a:r>
           </a:p>
         </p:txBody>
@@ -15619,7 +15619,7 @@
                 <a:ea typeface="微軟正黑體"/>
                 <a:cs typeface="微軟正黑體"/>
               </a:rPr>
-              <a:t>磁鐵好好玩｜翰林三上自然 第4單元</a:t>
+              <a:t>磁鐵好好玩｜翰林三上自然 第2單元</a:t>
             </a:r>
           </a:p>
         </p:txBody>
@@ -15763,7 +15763,7 @@
                 <a:ea typeface="微軟正黑體"/>
                 <a:cs typeface="微軟正黑體"/>
               </a:rPr>
-              <a:t>4-1</a:t>
+              <a:t>2-1</a:t>
             </a:r>
           </a:p>
         </p:txBody>
@@ -16171,7 +16171,7 @@
                 <a:ea typeface="微軟正黑體"/>
                 <a:cs typeface="微軟正黑體"/>
               </a:rPr>
-              <a:t>磁鐵好好玩｜翰林三上自然 第4單元</a:t>
+              <a:t>磁鐵好好玩｜翰林三上自然 第2單元</a:t>
             </a:r>
           </a:p>
         </p:txBody>
